--- a/Coffee Machines-Safety.pptx
+++ b/Coffee Machines-Safety.pptx
@@ -6,9 +6,11 @@
   </p:sldMasterIdLst>
   <p:sldIdLst>
     <p:sldId id="256" r:id="rId2"/>
-    <p:sldId id="257" r:id="rId3"/>
-    <p:sldId id="258" r:id="rId4"/>
-    <p:sldId id="259" r:id="rId5"/>
+    <p:sldId id="260" r:id="rId3"/>
+    <p:sldId id="257" r:id="rId4"/>
+    <p:sldId id="258" r:id="rId5"/>
+    <p:sldId id="259" r:id="rId6"/>
+    <p:sldId id="261" r:id="rId7"/>
   </p:sldIdLst>
   <p:sldSz cx="12192000" cy="6858000"/>
   <p:notesSz cx="6858000" cy="9144000"/>
@@ -262,7 +264,7 @@
           <a:p>
             <a:fld id="{66C1AB9B-4799-457D-880D-A3F1438FFD6A}" type="datetimeFigureOut">
               <a:rPr lang="en-US" smtClean="0"/>
-              <a:t>9/7/2026</a:t>
+              <a:t>9/8/2026</a:t>
             </a:fld>
             <a:endParaRPr lang="en-US"/>
           </a:p>
@@ -460,7 +462,7 @@
           <a:p>
             <a:fld id="{66C1AB9B-4799-457D-880D-A3F1438FFD6A}" type="datetimeFigureOut">
               <a:rPr lang="en-US" smtClean="0"/>
-              <a:t>9/7/2026</a:t>
+              <a:t>9/8/2026</a:t>
             </a:fld>
             <a:endParaRPr lang="en-US"/>
           </a:p>
@@ -668,7 +670,7 @@
           <a:p>
             <a:fld id="{66C1AB9B-4799-457D-880D-A3F1438FFD6A}" type="datetimeFigureOut">
               <a:rPr lang="en-US" smtClean="0"/>
-              <a:t>9/7/2026</a:t>
+              <a:t>9/8/2026</a:t>
             </a:fld>
             <a:endParaRPr lang="en-US"/>
           </a:p>
@@ -866,7 +868,7 @@
           <a:p>
             <a:fld id="{66C1AB9B-4799-457D-880D-A3F1438FFD6A}" type="datetimeFigureOut">
               <a:rPr lang="en-US" smtClean="0"/>
-              <a:t>9/7/2026</a:t>
+              <a:t>9/8/2026</a:t>
             </a:fld>
             <a:endParaRPr lang="en-US"/>
           </a:p>
@@ -1141,7 +1143,7 @@
           <a:p>
             <a:fld id="{66C1AB9B-4799-457D-880D-A3F1438FFD6A}" type="datetimeFigureOut">
               <a:rPr lang="en-US" smtClean="0"/>
-              <a:t>9/7/2026</a:t>
+              <a:t>9/8/2026</a:t>
             </a:fld>
             <a:endParaRPr lang="en-US"/>
           </a:p>
@@ -1406,7 +1408,7 @@
           <a:p>
             <a:fld id="{66C1AB9B-4799-457D-880D-A3F1438FFD6A}" type="datetimeFigureOut">
               <a:rPr lang="en-US" smtClean="0"/>
-              <a:t>9/7/2026</a:t>
+              <a:t>9/8/2026</a:t>
             </a:fld>
             <a:endParaRPr lang="en-US"/>
           </a:p>
@@ -1818,7 +1820,7 @@
           <a:p>
             <a:fld id="{66C1AB9B-4799-457D-880D-A3F1438FFD6A}" type="datetimeFigureOut">
               <a:rPr lang="en-US" smtClean="0"/>
-              <a:t>9/7/2026</a:t>
+              <a:t>9/8/2026</a:t>
             </a:fld>
             <a:endParaRPr lang="en-US"/>
           </a:p>
@@ -1959,7 +1961,7 @@
           <a:p>
             <a:fld id="{66C1AB9B-4799-457D-880D-A3F1438FFD6A}" type="datetimeFigureOut">
               <a:rPr lang="en-US" smtClean="0"/>
-              <a:t>9/7/2026</a:t>
+              <a:t>9/8/2026</a:t>
             </a:fld>
             <a:endParaRPr lang="en-US"/>
           </a:p>
@@ -2072,7 +2074,7 @@
           <a:p>
             <a:fld id="{66C1AB9B-4799-457D-880D-A3F1438FFD6A}" type="datetimeFigureOut">
               <a:rPr lang="en-US" smtClean="0"/>
-              <a:t>9/7/2026</a:t>
+              <a:t>9/8/2026</a:t>
             </a:fld>
             <a:endParaRPr lang="en-US"/>
           </a:p>
@@ -2383,7 +2385,7 @@
           <a:p>
             <a:fld id="{66C1AB9B-4799-457D-880D-A3F1438FFD6A}" type="datetimeFigureOut">
               <a:rPr lang="en-US" smtClean="0"/>
-              <a:t>9/7/2026</a:t>
+              <a:t>9/8/2026</a:t>
             </a:fld>
             <a:endParaRPr lang="en-US"/>
           </a:p>
@@ -2671,7 +2673,7 @@
           <a:p>
             <a:fld id="{66C1AB9B-4799-457D-880D-A3F1438FFD6A}" type="datetimeFigureOut">
               <a:rPr lang="en-US" smtClean="0"/>
-              <a:t>9/7/2026</a:t>
+              <a:t>9/8/2026</a:t>
             </a:fld>
             <a:endParaRPr lang="en-US"/>
           </a:p>
@@ -2912,7 +2914,7 @@
           <a:p>
             <a:fld id="{66C1AB9B-4799-457D-880D-A3F1438FFD6A}" type="datetimeFigureOut">
               <a:rPr lang="en-US" smtClean="0"/>
-              <a:t>9/7/2026</a:t>
+              <a:t>9/8/2026</a:t>
             </a:fld>
             <a:endParaRPr lang="en-US"/>
           </a:p>
@@ -3354,7 +3356,7 @@
           <a:p>
             <a:r>
               <a:rPr lang="en-US" b="1" dirty="0"/>
-              <a:t>Coffee Machines</a:t>
+              <a:t>Safety: Coffee Machines</a:t>
             </a:r>
             <a:endParaRPr lang="en-US" dirty="0"/>
           </a:p>
@@ -3402,6 +3404,153 @@
 </file>
 
 <file path=ppt/slides/slide2.xml><?xml version="1.0" encoding="utf-8"?>
+<p:sld xmlns:a="http://schemas.openxmlformats.org/drawingml/2006/main" xmlns:r="http://schemas.openxmlformats.org/officeDocument/2006/relationships" xmlns:p="http://schemas.openxmlformats.org/presentationml/2006/main">
+  <p:cSld>
+    <p:spTree>
+      <p:nvGrpSpPr>
+        <p:cNvPr id="1" name=""/>
+        <p:cNvGrpSpPr/>
+        <p:nvPr/>
+      </p:nvGrpSpPr>
+      <p:grpSpPr>
+        <a:xfrm>
+          <a:off x="0" y="0"/>
+          <a:ext cx="0" cy="0"/>
+          <a:chOff x="0" y="0"/>
+          <a:chExt cx="0" cy="0"/>
+        </a:xfrm>
+      </p:grpSpPr>
+      <p:sp>
+        <p:nvSpPr>
+          <p:cNvPr id="2" name="Title 1">
+            <a:extLst>
+              <a:ext uri="{FF2B5EF4-FFF2-40B4-BE49-F238E27FC236}">
+                <a16:creationId xmlns:a16="http://schemas.microsoft.com/office/drawing/2014/main" id="{EC79BAF5-4B43-4CC3-A419-297A83F527DD}"/>
+              </a:ext>
+            </a:extLst>
+          </p:cNvPr>
+          <p:cNvSpPr>
+            <a:spLocks noGrp="1"/>
+          </p:cNvSpPr>
+          <p:nvPr>
+            <p:ph type="title"/>
+          </p:nvPr>
+        </p:nvSpPr>
+        <p:spPr/>
+        <p:txBody>
+          <a:bodyPr/>
+          <a:lstStyle/>
+          <a:p>
+            <a:r>
+              <a:rPr lang="en-US" dirty="0"/>
+              <a:t>Safety</a:t>
+            </a:r>
+          </a:p>
+        </p:txBody>
+      </p:sp>
+      <p:pic>
+        <p:nvPicPr>
+          <p:cNvPr id="5" name="Content Placeholder 4">
+            <a:extLst>
+              <a:ext uri="{FF2B5EF4-FFF2-40B4-BE49-F238E27FC236}">
+                <a16:creationId xmlns:a16="http://schemas.microsoft.com/office/drawing/2014/main" id="{2F1AFD07-87F1-4FC1-ACC0-7A7A06822F58}"/>
+              </a:ext>
+            </a:extLst>
+          </p:cNvPr>
+          <p:cNvPicPr>
+            <a:picLocks noGrp="1" noChangeAspect="1"/>
+          </p:cNvPicPr>
+          <p:nvPr>
+            <p:ph idx="1"/>
+          </p:nvPr>
+        </p:nvPicPr>
+        <p:blipFill>
+          <a:blip r:embed="rId2"/>
+          <a:stretch>
+            <a:fillRect/>
+          </a:stretch>
+        </p:blipFill>
+        <p:spPr>
+          <a:xfrm>
+            <a:off x="4482465" y="1825625"/>
+            <a:ext cx="3227069" cy="4351338"/>
+          </a:xfrm>
+        </p:spPr>
+      </p:pic>
+      <p:pic>
+        <p:nvPicPr>
+          <p:cNvPr id="7" name="Picture 6">
+            <a:extLst>
+              <a:ext uri="{FF2B5EF4-FFF2-40B4-BE49-F238E27FC236}">
+                <a16:creationId xmlns:a16="http://schemas.microsoft.com/office/drawing/2014/main" id="{9BA98F0F-D53E-4709-A41D-7FA59455B0FD}"/>
+              </a:ext>
+            </a:extLst>
+          </p:cNvPr>
+          <p:cNvPicPr>
+            <a:picLocks noChangeAspect="1"/>
+          </p:cNvPicPr>
+          <p:nvPr/>
+        </p:nvPicPr>
+        <p:blipFill>
+          <a:blip r:embed="rId3"/>
+          <a:stretch>
+            <a:fillRect/>
+          </a:stretch>
+        </p:blipFill>
+        <p:spPr>
+          <a:xfrm>
+            <a:off x="7709534" y="1825624"/>
+            <a:ext cx="3293283" cy="4351337"/>
+          </a:xfrm>
+          <a:prstGeom prst="rect">
+            <a:avLst/>
+          </a:prstGeom>
+        </p:spPr>
+      </p:pic>
+      <p:pic>
+        <p:nvPicPr>
+          <p:cNvPr id="9" name="Picture 8">
+            <a:extLst>
+              <a:ext uri="{FF2B5EF4-FFF2-40B4-BE49-F238E27FC236}">
+                <a16:creationId xmlns:a16="http://schemas.microsoft.com/office/drawing/2014/main" id="{7BBDB2BD-49AC-4680-989E-6069025B68FA}"/>
+              </a:ext>
+            </a:extLst>
+          </p:cNvPr>
+          <p:cNvPicPr>
+            <a:picLocks noChangeAspect="1"/>
+          </p:cNvPicPr>
+          <p:nvPr/>
+        </p:nvPicPr>
+        <p:blipFill>
+          <a:blip r:embed="rId4"/>
+          <a:stretch>
+            <a:fillRect/>
+          </a:stretch>
+        </p:blipFill>
+        <p:spPr>
+          <a:xfrm>
+            <a:off x="1396651" y="1825624"/>
+            <a:ext cx="3085813" cy="4348347"/>
+          </a:xfrm>
+          <a:prstGeom prst="rect">
+            <a:avLst/>
+          </a:prstGeom>
+        </p:spPr>
+      </p:pic>
+    </p:spTree>
+    <p:extLst>
+      <p:ext uri="{BB962C8B-B14F-4D97-AF65-F5344CB8AC3E}">
+        <p14:creationId xmlns:p14="http://schemas.microsoft.com/office/powerpoint/2010/main" val="3570246756"/>
+      </p:ext>
+    </p:extLst>
+  </p:cSld>
+  <p:clrMapOvr>
+    <a:masterClrMapping/>
+  </p:clrMapOvr>
+</p:sld>
+</file>
+
+<file path=ppt/slides/slide3.xml><?xml version="1.0" encoding="utf-8"?>
 <p:sld xmlns:a="http://schemas.openxmlformats.org/drawingml/2006/main" xmlns:r="http://schemas.openxmlformats.org/officeDocument/2006/relationships" xmlns:p="http://schemas.openxmlformats.org/presentationml/2006/main">
   <p:cSld>
     <p:spTree>
@@ -3541,7 +3690,7 @@
 </p:sld>
 </file>
 
-<file path=ppt/slides/slide3.xml><?xml version="1.0" encoding="utf-8"?>
+<file path=ppt/slides/slide4.xml><?xml version="1.0" encoding="utf-8"?>
 <p:sld xmlns:a="http://schemas.openxmlformats.org/drawingml/2006/main" xmlns:r="http://schemas.openxmlformats.org/officeDocument/2006/relationships" xmlns:p="http://schemas.openxmlformats.org/presentationml/2006/main">
   <p:cSld>
     <p:spTree>
@@ -3691,7 +3840,7 @@
 </p:sld>
 </file>
 
-<file path=ppt/slides/slide4.xml><?xml version="1.0" encoding="utf-8"?>
+<file path=ppt/slides/slide5.xml><?xml version="1.0" encoding="utf-8"?>
 <p:sld xmlns:a="http://schemas.openxmlformats.org/drawingml/2006/main" xmlns:r="http://schemas.openxmlformats.org/officeDocument/2006/relationships" xmlns:p="http://schemas.openxmlformats.org/presentationml/2006/main">
   <p:cSld>
     <p:spTree>
@@ -3790,6 +3939,92 @@
     <p:extLst>
       <p:ext uri="{BB962C8B-B14F-4D97-AF65-F5344CB8AC3E}">
         <p14:creationId xmlns:p14="http://schemas.microsoft.com/office/powerpoint/2010/main" val="989079826"/>
+      </p:ext>
+    </p:extLst>
+  </p:cSld>
+  <p:clrMapOvr>
+    <a:masterClrMapping/>
+  </p:clrMapOvr>
+</p:sld>
+</file>
+
+<file path=ppt/slides/slide6.xml><?xml version="1.0" encoding="utf-8"?>
+<p:sld xmlns:a="http://schemas.openxmlformats.org/drawingml/2006/main" xmlns:r="http://schemas.openxmlformats.org/officeDocument/2006/relationships" xmlns:p="http://schemas.openxmlformats.org/presentationml/2006/main">
+  <p:cSld>
+    <p:spTree>
+      <p:nvGrpSpPr>
+        <p:cNvPr id="1" name=""/>
+        <p:cNvGrpSpPr/>
+        <p:nvPr/>
+      </p:nvGrpSpPr>
+      <p:grpSpPr>
+        <a:xfrm>
+          <a:off x="0" y="0"/>
+          <a:ext cx="0" cy="0"/>
+          <a:chOff x="0" y="0"/>
+          <a:chExt cx="0" cy="0"/>
+        </a:xfrm>
+      </p:grpSpPr>
+      <p:sp>
+        <p:nvSpPr>
+          <p:cNvPr id="2" name="Title 1">
+            <a:extLst>
+              <a:ext uri="{FF2B5EF4-FFF2-40B4-BE49-F238E27FC236}">
+                <a16:creationId xmlns:a16="http://schemas.microsoft.com/office/drawing/2014/main" id="{7C75BF2B-E29D-4AB0-83B4-EA670137E0E8}"/>
+              </a:ext>
+            </a:extLst>
+          </p:cNvPr>
+          <p:cNvSpPr>
+            <a:spLocks noGrp="1"/>
+          </p:cNvSpPr>
+          <p:nvPr>
+            <p:ph type="title"/>
+          </p:nvPr>
+        </p:nvSpPr>
+        <p:spPr/>
+        <p:txBody>
+          <a:bodyPr/>
+          <a:lstStyle/>
+          <a:p>
+            <a:r>
+              <a:rPr lang="en-US" dirty="0"/>
+              <a:t>Recalls</a:t>
+            </a:r>
+          </a:p>
+        </p:txBody>
+      </p:sp>
+      <p:sp>
+        <p:nvSpPr>
+          <p:cNvPr id="3" name="Content Placeholder 2">
+            <a:extLst>
+              <a:ext uri="{FF2B5EF4-FFF2-40B4-BE49-F238E27FC236}">
+                <a16:creationId xmlns:a16="http://schemas.microsoft.com/office/drawing/2014/main" id="{6CF69B16-E0D6-4FA5-AFB0-06D35448C896}"/>
+              </a:ext>
+            </a:extLst>
+          </p:cNvPr>
+          <p:cNvSpPr>
+            <a:spLocks noGrp="1"/>
+          </p:cNvSpPr>
+          <p:nvPr>
+            <p:ph idx="1"/>
+          </p:nvPr>
+        </p:nvSpPr>
+        <p:spPr/>
+        <p:txBody>
+          <a:bodyPr/>
+          <a:lstStyle/>
+          <a:p>
+            <a:r>
+              <a:rPr lang="en-US" dirty="0"/>
+              <a:t>Watch for recalls due to electrical failures or other potential hazards </a:t>
+            </a:r>
+          </a:p>
+        </p:txBody>
+      </p:sp>
+    </p:spTree>
+    <p:extLst>
+      <p:ext uri="{BB962C8B-B14F-4D97-AF65-F5344CB8AC3E}">
+        <p14:creationId xmlns:p14="http://schemas.microsoft.com/office/powerpoint/2010/main" val="2120755437"/>
       </p:ext>
     </p:extLst>
   </p:cSld>
